--- a/Roomie_Presentacion.pptx
+++ b/Roomie_Presentacion.pptx
@@ -2077,6 +2077,87 @@
           <a:lstStyle/>
           <a:p>
             <a:endParaRPr lang="es-ES"/>
+          </a:p>
+        </p:txBody>
+      </p:sp>
+      <p:sp>
+        <p:nvSpPr>
+          <p:cNvPr id="5" name="CuadroTexto 4">
+            <a:extLst>
+              <a:ext uri="{FF2B5EF4-FFF2-40B4-BE49-F238E27FC236}">
+                <a16:creationId xmlns:a16="http://schemas.microsoft.com/office/drawing/2014/main" id="{8E79C14E-FE1D-0552-2643-5A8212EEE392}"/>
+              </a:ext>
+            </a:extLst>
+          </p:cNvPr>
+          <p:cNvSpPr txBox="1"/>
+          <p:nvPr/>
+        </p:nvSpPr>
+        <p:spPr>
+          <a:xfrm>
+            <a:off x="3115157" y="870599"/>
+            <a:ext cx="2109127" cy="369332"/>
+          </a:xfrm>
+          <a:prstGeom prst="rect">
+            <a:avLst/>
+          </a:prstGeom>
+          <a:noFill/>
+        </p:spPr>
+        <p:txBody>
+          <a:bodyPr wrap="square" rtlCol="0">
+            <a:spAutoFit/>
+          </a:bodyPr>
+          <a:lstStyle/>
+          <a:p>
+            <a:r>
+              <a:rPr lang="es-ES" dirty="0">
+                <a:solidFill>
+                  <a:srgbClr val="0563C1"/>
+                </a:solidFill>
+                <a:hlinkClick r:id="rId3">
+                  <a:extLst>
+                    <a:ext uri="{A12FA001-AC4F-418D-AE19-62706E023703}">
+                      <ahyp:hlinkClr xmlns:ahyp="http://schemas.microsoft.com/office/drawing/2018/hyperlinkcolor" val="tx"/>
+                    </a:ext>
+                  </a:extLst>
+                </a:hlinkClick>
+              </a:rPr>
+              <a:t>Link a video </a:t>
+            </a:r>
+            <a:r>
+              <a:rPr lang="es-ES" dirty="0" err="1">
+                <a:solidFill>
+                  <a:srgbClr val="0563C1"/>
+                </a:solidFill>
+                <a:hlinkClick r:id="rId3">
+                  <a:extLst>
+                    <a:ext uri="{A12FA001-AC4F-418D-AE19-62706E023703}">
+                      <ahyp:hlinkClr xmlns:ahyp="http://schemas.microsoft.com/office/drawing/2018/hyperlinkcolor" val="tx"/>
+                    </a:ext>
+                  </a:extLst>
+                </a:hlinkClick>
+              </a:rPr>
+              <a:t>youtube</a:t>
+            </a:r>
+            <a:r>
+              <a:rPr lang="es-ES" dirty="0">
+                <a:solidFill>
+                  <a:schemeClr val="bg1"/>
+                </a:solidFill>
+                <a:hlinkClick r:id="rId3">
+                  <a:extLst>
+                    <a:ext uri="{A12FA001-AC4F-418D-AE19-62706E023703}">
+                      <ahyp:hlinkClr xmlns:ahyp="http://schemas.microsoft.com/office/drawing/2018/hyperlinkcolor" val="tx"/>
+                    </a:ext>
+                  </a:extLst>
+                </a:hlinkClick>
+              </a:rPr>
+              <a:t> </a:t>
+            </a:r>
+            <a:endParaRPr lang="es-ES" dirty="0">
+              <a:solidFill>
+                <a:schemeClr val="bg1"/>
+              </a:solidFill>
+            </a:endParaRPr>
           </a:p>
         </p:txBody>
       </p:sp>

--- a/Roomie_Presentacion.pptx
+++ b/Roomie_Presentacion.pptx
@@ -17,8 +17,8 @@
     <p:sldId id="265" r:id="rId8"/>
     <p:sldId id="266" r:id="rId9"/>
     <p:sldId id="261" r:id="rId10"/>
-    <p:sldId id="267" r:id="rId11"/>
-    <p:sldId id="263" r:id="rId12"/>
+    <p:sldId id="263" r:id="rId11"/>
+    <p:sldId id="267" r:id="rId12"/>
   </p:sldIdLst>
   <p:sldSz cx="9144000" cy="5143500" type="screen16x9"/>
   <p:notesSz cx="5143500" cy="9144000"/>
@@ -336,6 +336,90 @@
   <p:cSld>
     <p:spTree>
       <p:nvGrpSpPr>
+        <p:cNvPr id="1" name=""/>
+        <p:cNvGrpSpPr/>
+        <p:nvPr/>
+      </p:nvGrpSpPr>
+      <p:grpSpPr>
+        <a:xfrm>
+          <a:off x="0" y="0"/>
+          <a:ext cx="0" cy="0"/>
+          <a:chOff x="0" y="0"/>
+          <a:chExt cx="0" cy="0"/>
+        </a:xfrm>
+      </p:grpSpPr>
+      <p:sp>
+        <p:nvSpPr>
+          <p:cNvPr id="2" name="Slide Image Placeholder 1"/>
+          <p:cNvSpPr>
+            <a:spLocks noGrp="1" noRot="1" noChangeAspect="1"/>
+          </p:cNvSpPr>
+          <p:nvPr>
+            <p:ph type="sldImg"/>
+          </p:nvPr>
+        </p:nvSpPr>
+        <p:spPr/>
+      </p:sp>
+      <p:sp>
+        <p:nvSpPr>
+          <p:cNvPr id="3" name="Notes Placeholder 2"/>
+          <p:cNvSpPr>
+            <a:spLocks noGrp="1"/>
+          </p:cNvSpPr>
+          <p:nvPr>
+            <p:ph type="body" idx="1"/>
+          </p:nvPr>
+        </p:nvSpPr>
+        <p:spPr/>
+        <p:txBody>
+          <a:bodyPr/>
+          <a:lstStyle/>
+          <a:p>
+            <a:endParaRPr lang="en-US" dirty="0"/>
+          </a:p>
+        </p:txBody>
+      </p:sp>
+      <p:sp>
+        <p:nvSpPr>
+          <p:cNvPr id="4" name="Slide Number Placeholder 3"/>
+          <p:cNvSpPr>
+            <a:spLocks noGrp="1"/>
+          </p:cNvSpPr>
+          <p:nvPr>
+            <p:ph type="sldNum" sz="quarter" idx="10"/>
+          </p:nvPr>
+        </p:nvSpPr>
+        <p:spPr/>
+        <p:txBody>
+          <a:bodyPr/>
+          <a:lstStyle/>
+          <a:p>
+            <a:fld id="{F7021451-1387-4CA6-816F-3879F97B5CBC}" type="slidenum">
+              <a:rPr lang="en-US"/>
+              <a:t>10</a:t>
+            </a:fld>
+            <a:endParaRPr lang="en-US"/>
+          </a:p>
+        </p:txBody>
+      </p:sp>
+    </p:spTree>
+    <p:extLst>
+      <p:ext uri="{BB962C8B-B14F-4D97-AF65-F5344CB8AC3E}">
+        <p14:creationId xmlns:p14="http://schemas.microsoft.com/office/powerpoint/2010/main" val="1024086991"/>
+      </p:ext>
+    </p:extLst>
+  </p:cSld>
+  <p:clrMapOvr>
+    <a:masterClrMapping/>
+  </p:clrMapOvr>
+</p:notes>
+</file>
+
+<file path=ppt/notesSlides/notesSlide11.xml><?xml version="1.0" encoding="utf-8"?>
+<p:notes xmlns:a="http://schemas.openxmlformats.org/drawingml/2006/main" xmlns:r="http://schemas.openxmlformats.org/officeDocument/2006/relationships" xmlns:p="http://schemas.openxmlformats.org/presentationml/2006/main">
+  <p:cSld>
+    <p:spTree>
+      <p:nvGrpSpPr>
         <p:cNvPr id="1" name="">
           <a:extLst>
             <a:ext uri="{FF2B5EF4-FFF2-40B4-BE49-F238E27FC236}">
@@ -420,7 +504,7 @@
           <a:p>
             <a:fld id="{F7021451-1387-4CA6-816F-3879F97B5CBC}" type="slidenum">
               <a:rPr lang="en-US"/>
-              <a:t>10</a:t>
+              <a:t>11</a:t>
             </a:fld>
             <a:endParaRPr lang="en-US"/>
           </a:p>
@@ -430,90 +514,6 @@
     <p:extLst>
       <p:ext uri="{BB962C8B-B14F-4D97-AF65-F5344CB8AC3E}">
         <p14:creationId xmlns:p14="http://schemas.microsoft.com/office/powerpoint/2010/main" val="1334328319"/>
-      </p:ext>
-    </p:extLst>
-  </p:cSld>
-  <p:clrMapOvr>
-    <a:masterClrMapping/>
-  </p:clrMapOvr>
-</p:notes>
-</file>
-
-<file path=ppt/notesSlides/notesSlide11.xml><?xml version="1.0" encoding="utf-8"?>
-<p:notes xmlns:a="http://schemas.openxmlformats.org/drawingml/2006/main" xmlns:r="http://schemas.openxmlformats.org/officeDocument/2006/relationships" xmlns:p="http://schemas.openxmlformats.org/presentationml/2006/main">
-  <p:cSld>
-    <p:spTree>
-      <p:nvGrpSpPr>
-        <p:cNvPr id="1" name=""/>
-        <p:cNvGrpSpPr/>
-        <p:nvPr/>
-      </p:nvGrpSpPr>
-      <p:grpSpPr>
-        <a:xfrm>
-          <a:off x="0" y="0"/>
-          <a:ext cx="0" cy="0"/>
-          <a:chOff x="0" y="0"/>
-          <a:chExt cx="0" cy="0"/>
-        </a:xfrm>
-      </p:grpSpPr>
-      <p:sp>
-        <p:nvSpPr>
-          <p:cNvPr id="2" name="Slide Image Placeholder 1"/>
-          <p:cNvSpPr>
-            <a:spLocks noGrp="1" noRot="1" noChangeAspect="1"/>
-          </p:cNvSpPr>
-          <p:nvPr>
-            <p:ph type="sldImg"/>
-          </p:nvPr>
-        </p:nvSpPr>
-        <p:spPr/>
-      </p:sp>
-      <p:sp>
-        <p:nvSpPr>
-          <p:cNvPr id="3" name="Notes Placeholder 2"/>
-          <p:cNvSpPr>
-            <a:spLocks noGrp="1"/>
-          </p:cNvSpPr>
-          <p:nvPr>
-            <p:ph type="body" idx="1"/>
-          </p:nvPr>
-        </p:nvSpPr>
-        <p:spPr/>
-        <p:txBody>
-          <a:bodyPr/>
-          <a:lstStyle/>
-          <a:p>
-            <a:endParaRPr lang="en-US" dirty="0"/>
-          </a:p>
-        </p:txBody>
-      </p:sp>
-      <p:sp>
-        <p:nvSpPr>
-          <p:cNvPr id="4" name="Slide Number Placeholder 3"/>
-          <p:cNvSpPr>
-            <a:spLocks noGrp="1"/>
-          </p:cNvSpPr>
-          <p:nvPr>
-            <p:ph type="sldNum" sz="quarter" idx="10"/>
-          </p:nvPr>
-        </p:nvSpPr>
-        <p:spPr/>
-        <p:txBody>
-          <a:bodyPr/>
-          <a:lstStyle/>
-          <a:p>
-            <a:fld id="{F7021451-1387-4CA6-816F-3879F97B5CBC}" type="slidenum">
-              <a:rPr lang="en-US"/>
-              <a:t>11</a:t>
-            </a:fld>
-            <a:endParaRPr lang="en-US"/>
-          </a:p>
-        </p:txBody>
-      </p:sp>
-    </p:spTree>
-    <p:extLst>
-      <p:ext uri="{BB962C8B-B14F-4D97-AF65-F5344CB8AC3E}">
-        <p14:creationId xmlns:p14="http://schemas.microsoft.com/office/powerpoint/2010/main" val="1024086991"/>
       </p:ext>
     </p:extLst>
   </p:cSld>
@@ -1930,6 +1930,1032 @@
 
 <file path=ppt/slides/slide10.xml><?xml version="1.0" encoding="utf-8"?>
 <p:sld xmlns:a="http://schemas.openxmlformats.org/drawingml/2006/main" xmlns:r="http://schemas.openxmlformats.org/officeDocument/2006/relationships" xmlns:p="http://schemas.openxmlformats.org/presentationml/2006/main">
+  <p:cSld name="Slide 8">
+    <p:bg>
+      <p:bgPr>
+        <a:solidFill>
+          <a:srgbClr val="1A2340"/>
+        </a:solidFill>
+        <a:effectLst/>
+      </p:bgPr>
+    </p:bg>
+    <p:spTree>
+      <p:nvGrpSpPr>
+        <p:cNvPr id="1" name=""/>
+        <p:cNvGrpSpPr/>
+        <p:nvPr/>
+      </p:nvGrpSpPr>
+      <p:grpSpPr>
+        <a:xfrm>
+          <a:off x="0" y="0"/>
+          <a:ext cx="0" cy="0"/>
+          <a:chOff x="0" y="0"/>
+          <a:chExt cx="0" cy="0"/>
+        </a:xfrm>
+      </p:grpSpPr>
+      <p:sp>
+        <p:nvSpPr>
+          <p:cNvPr id="2" name="Shape 0"/>
+          <p:cNvSpPr/>
+          <p:nvPr/>
+        </p:nvSpPr>
+        <p:spPr>
+          <a:xfrm>
+            <a:off x="5943600" y="-457200"/>
+            <a:ext cx="4572000" cy="4572000"/>
+          </a:xfrm>
+          <a:prstGeom prst="ellipse">
+            <a:avLst/>
+          </a:prstGeom>
+          <a:solidFill>
+            <a:srgbClr val="243562"/>
+          </a:solidFill>
+          <a:ln w="12700">
+            <a:solidFill>
+              <a:srgbClr val="243562"/>
+            </a:solidFill>
+            <a:prstDash val="solid"/>
+          </a:ln>
+        </p:spPr>
+        <p:txBody>
+          <a:bodyPr/>
+          <a:lstStyle/>
+          <a:p>
+            <a:endParaRPr lang="es-ES"/>
+          </a:p>
+        </p:txBody>
+      </p:sp>
+      <p:sp>
+        <p:nvSpPr>
+          <p:cNvPr id="3" name="Shape 1"/>
+          <p:cNvSpPr/>
+          <p:nvPr/>
+        </p:nvSpPr>
+        <p:spPr>
+          <a:xfrm>
+            <a:off x="0" y="0"/>
+            <a:ext cx="5486400" cy="502920"/>
+          </a:xfrm>
+          <a:prstGeom prst="rect">
+            <a:avLst/>
+          </a:prstGeom>
+          <a:solidFill>
+            <a:srgbClr val="0D9488"/>
+          </a:solidFill>
+          <a:ln w="12700">
+            <a:solidFill>
+              <a:srgbClr val="0D9488"/>
+            </a:solidFill>
+            <a:prstDash val="solid"/>
+          </a:ln>
+        </p:spPr>
+        <p:txBody>
+          <a:bodyPr/>
+          <a:lstStyle/>
+          <a:p>
+            <a:endParaRPr lang="es-ES"/>
+          </a:p>
+        </p:txBody>
+      </p:sp>
+      <p:sp>
+        <p:nvSpPr>
+          <p:cNvPr id="4" name="Text 2"/>
+          <p:cNvSpPr/>
+          <p:nvPr/>
+        </p:nvSpPr>
+        <p:spPr>
+          <a:xfrm>
+            <a:off x="365760" y="73152"/>
+            <a:ext cx="4754880" cy="347472"/>
+          </a:xfrm>
+          <a:prstGeom prst="rect">
+            <a:avLst/>
+          </a:prstGeom>
+          <a:noFill/>
+          <a:ln/>
+        </p:spPr>
+        <p:txBody>
+          <a:bodyPr wrap="square" lIns="0" tIns="0" rIns="0" bIns="0" rtlCol="0" anchor="ctr"/>
+          <a:lstStyle/>
+          <a:p>
+            <a:pPr marL="0" indent="0">
+              <a:buNone/>
+            </a:pPr>
+            <a:r>
+              <a:rPr lang="en-US" sz="1400" b="1" dirty="0">
+                <a:solidFill>
+                  <a:srgbClr val="FFFFFF"/>
+                </a:solidFill>
+                <a:latin typeface="Trebuchet MS" pitchFamily="34" charset="0"/>
+                <a:ea typeface="Trebuchet MS" pitchFamily="34" charset="-122"/>
+                <a:cs typeface="Trebuchet MS" pitchFamily="34" charset="-120"/>
+              </a:rPr>
+              <a:t>CONCLUSIONES</a:t>
+            </a:r>
+            <a:endParaRPr lang="en-US" sz="1400" dirty="0"/>
+          </a:p>
+        </p:txBody>
+      </p:sp>
+      <p:sp>
+        <p:nvSpPr>
+          <p:cNvPr id="5" name="Text 3"/>
+          <p:cNvSpPr/>
+          <p:nvPr/>
+        </p:nvSpPr>
+        <p:spPr>
+          <a:xfrm>
+            <a:off x="365760" y="640080"/>
+            <a:ext cx="4572000" cy="384048"/>
+          </a:xfrm>
+          <a:prstGeom prst="rect">
+            <a:avLst/>
+          </a:prstGeom>
+          <a:noFill/>
+          <a:ln/>
+        </p:spPr>
+        <p:txBody>
+          <a:bodyPr wrap="square" lIns="0" tIns="0" rIns="0" bIns="0" rtlCol="0" anchor="ctr"/>
+          <a:lstStyle/>
+          <a:p>
+            <a:pPr marL="0" indent="0">
+              <a:buNone/>
+            </a:pPr>
+            <a:r>
+              <a:rPr lang="en-US" sz="1500" b="1" dirty="0">
+                <a:solidFill>
+                  <a:srgbClr val="14B8A6"/>
+                </a:solidFill>
+                <a:latin typeface="Trebuchet MS" pitchFamily="34" charset="0"/>
+                <a:ea typeface="Trebuchet MS" pitchFamily="34" charset="-122"/>
+                <a:cs typeface="Trebuchet MS" pitchFamily="34" charset="-120"/>
+              </a:rPr>
+              <a:t>✅  Logros</a:t>
+            </a:r>
+            <a:endParaRPr lang="en-US" sz="1500" dirty="0"/>
+          </a:p>
+        </p:txBody>
+      </p:sp>
+      <p:sp>
+        <p:nvSpPr>
+          <p:cNvPr id="6" name="Shape 4"/>
+          <p:cNvSpPr/>
+          <p:nvPr/>
+        </p:nvSpPr>
+        <p:spPr>
+          <a:xfrm>
+            <a:off x="365760" y="1088136"/>
+            <a:ext cx="54864" cy="274320"/>
+          </a:xfrm>
+          <a:prstGeom prst="rect">
+            <a:avLst/>
+          </a:prstGeom>
+          <a:solidFill>
+            <a:srgbClr val="0D9488"/>
+          </a:solidFill>
+          <a:ln w="12700">
+            <a:solidFill>
+              <a:srgbClr val="0D9488"/>
+            </a:solidFill>
+            <a:prstDash val="solid"/>
+          </a:ln>
+        </p:spPr>
+        <p:txBody>
+          <a:bodyPr/>
+          <a:lstStyle/>
+          <a:p>
+            <a:endParaRPr lang="es-ES"/>
+          </a:p>
+        </p:txBody>
+      </p:sp>
+      <p:sp>
+        <p:nvSpPr>
+          <p:cNvPr id="7" name="Text 5"/>
+          <p:cNvSpPr/>
+          <p:nvPr/>
+        </p:nvSpPr>
+        <p:spPr>
+          <a:xfrm>
+            <a:off x="566928" y="978408"/>
+            <a:ext cx="5394960" cy="475488"/>
+          </a:xfrm>
+          <a:prstGeom prst="rect">
+            <a:avLst/>
+          </a:prstGeom>
+          <a:noFill/>
+          <a:ln/>
+        </p:spPr>
+        <p:txBody>
+          <a:bodyPr wrap="square" lIns="0" tIns="0" rIns="0" bIns="0" rtlCol="0" anchor="ctr"/>
+          <a:lstStyle/>
+          <a:p>
+            <a:pPr marL="0" indent="0">
+              <a:buNone/>
+            </a:pPr>
+            <a:r>
+              <a:rPr lang="en-US" sz="1200" dirty="0">
+                <a:solidFill>
+                  <a:srgbClr val="F1F5F9"/>
+                </a:solidFill>
+                <a:latin typeface="Calibri" pitchFamily="34" charset="0"/>
+                <a:ea typeface="Calibri" pitchFamily="34" charset="-122"/>
+                <a:cs typeface="Calibri" pitchFamily="34" charset="-120"/>
+              </a:rPr>
+              <a:t>Web funcional con reconocimiento facial, filtros y solicitud de visitas</a:t>
+            </a:r>
+            <a:endParaRPr lang="en-US" sz="1200" dirty="0"/>
+          </a:p>
+        </p:txBody>
+      </p:sp>
+      <p:sp>
+        <p:nvSpPr>
+          <p:cNvPr id="8" name="Shape 6"/>
+          <p:cNvSpPr/>
+          <p:nvPr/>
+        </p:nvSpPr>
+        <p:spPr>
+          <a:xfrm>
+            <a:off x="365760" y="1476756"/>
+            <a:ext cx="54864" cy="274320"/>
+          </a:xfrm>
+          <a:prstGeom prst="rect">
+            <a:avLst/>
+          </a:prstGeom>
+          <a:solidFill>
+            <a:srgbClr val="0D9488"/>
+          </a:solidFill>
+          <a:ln w="12700">
+            <a:solidFill>
+              <a:srgbClr val="0D9488"/>
+            </a:solidFill>
+            <a:prstDash val="solid"/>
+          </a:ln>
+        </p:spPr>
+        <p:txBody>
+          <a:bodyPr/>
+          <a:lstStyle/>
+          <a:p>
+            <a:endParaRPr lang="es-ES"/>
+          </a:p>
+        </p:txBody>
+      </p:sp>
+      <p:sp>
+        <p:nvSpPr>
+          <p:cNvPr id="9" name="Text 7"/>
+          <p:cNvSpPr/>
+          <p:nvPr/>
+        </p:nvSpPr>
+        <p:spPr>
+          <a:xfrm>
+            <a:off x="566928" y="1367028"/>
+            <a:ext cx="5394960" cy="475488"/>
+          </a:xfrm>
+          <a:prstGeom prst="rect">
+            <a:avLst/>
+          </a:prstGeom>
+          <a:noFill/>
+          <a:ln/>
+        </p:spPr>
+        <p:txBody>
+          <a:bodyPr wrap="square" lIns="0" tIns="0" rIns="0" bIns="0" rtlCol="0" anchor="ctr"/>
+          <a:lstStyle/>
+          <a:p>
+            <a:pPr marL="0" indent="0">
+              <a:buNone/>
+            </a:pPr>
+            <a:r>
+              <a:rPr lang="en-US" sz="1200" dirty="0">
+                <a:solidFill>
+                  <a:srgbClr val="F1F5F9"/>
+                </a:solidFill>
+                <a:latin typeface="Calibri" pitchFamily="34" charset="0"/>
+                <a:ea typeface="Calibri" pitchFamily="34" charset="-122"/>
+                <a:cs typeface="Calibri" pitchFamily="34" charset="-120"/>
+              </a:rPr>
+              <a:t>Base de datos completa con triggers y app JavaFX de administración</a:t>
+            </a:r>
+            <a:endParaRPr lang="en-US" sz="1200" dirty="0"/>
+          </a:p>
+        </p:txBody>
+      </p:sp>
+      <p:sp>
+        <p:nvSpPr>
+          <p:cNvPr id="10" name="Shape 8"/>
+          <p:cNvSpPr/>
+          <p:nvPr/>
+        </p:nvSpPr>
+        <p:spPr>
+          <a:xfrm>
+            <a:off x="365760" y="1888236"/>
+            <a:ext cx="54864" cy="274320"/>
+          </a:xfrm>
+          <a:prstGeom prst="rect">
+            <a:avLst/>
+          </a:prstGeom>
+          <a:solidFill>
+            <a:srgbClr val="0D9488"/>
+          </a:solidFill>
+          <a:ln w="12700">
+            <a:solidFill>
+              <a:srgbClr val="0D9488"/>
+            </a:solidFill>
+            <a:prstDash val="solid"/>
+          </a:ln>
+        </p:spPr>
+        <p:txBody>
+          <a:bodyPr/>
+          <a:lstStyle/>
+          <a:p>
+            <a:endParaRPr lang="es-ES"/>
+          </a:p>
+        </p:txBody>
+      </p:sp>
+      <p:sp>
+        <p:nvSpPr>
+          <p:cNvPr id="11" name="Text 9"/>
+          <p:cNvSpPr/>
+          <p:nvPr/>
+        </p:nvSpPr>
+        <p:spPr>
+          <a:xfrm>
+            <a:off x="566928" y="1778508"/>
+            <a:ext cx="5394960" cy="475488"/>
+          </a:xfrm>
+          <a:prstGeom prst="rect">
+            <a:avLst/>
+          </a:prstGeom>
+          <a:noFill/>
+          <a:ln/>
+        </p:spPr>
+        <p:txBody>
+          <a:bodyPr wrap="square" lIns="0" tIns="0" rIns="0" bIns="0" rtlCol="0" anchor="ctr"/>
+          <a:lstStyle/>
+          <a:p>
+            <a:pPr marL="0" indent="0">
+              <a:buNone/>
+            </a:pPr>
+            <a:r>
+              <a:rPr lang="en-US" sz="1200" dirty="0">
+                <a:solidFill>
+                  <a:srgbClr val="F1F5F9"/>
+                </a:solidFill>
+                <a:latin typeface="Calibri" pitchFamily="34" charset="0"/>
+                <a:ea typeface="Calibri" pitchFamily="34" charset="-122"/>
+                <a:cs typeface="Calibri" pitchFamily="34" charset="-120"/>
+              </a:rPr>
+              <a:t>Simulación de conexión frontend–backend con Local Storage</a:t>
+            </a:r>
+            <a:endParaRPr lang="en-US" sz="1200" dirty="0"/>
+          </a:p>
+        </p:txBody>
+      </p:sp>
+      <p:sp>
+        <p:nvSpPr>
+          <p:cNvPr id="12" name="Shape 10"/>
+          <p:cNvSpPr/>
+          <p:nvPr/>
+        </p:nvSpPr>
+        <p:spPr>
+          <a:xfrm>
+            <a:off x="365760" y="2276856"/>
+            <a:ext cx="54864" cy="274320"/>
+          </a:xfrm>
+          <a:prstGeom prst="rect">
+            <a:avLst/>
+          </a:prstGeom>
+          <a:solidFill>
+            <a:srgbClr val="0D9488"/>
+          </a:solidFill>
+          <a:ln w="12700">
+            <a:solidFill>
+              <a:srgbClr val="0D9488"/>
+            </a:solidFill>
+            <a:prstDash val="solid"/>
+          </a:ln>
+        </p:spPr>
+        <p:txBody>
+          <a:bodyPr/>
+          <a:lstStyle/>
+          <a:p>
+            <a:endParaRPr lang="es-ES"/>
+          </a:p>
+        </p:txBody>
+      </p:sp>
+      <p:sp>
+        <p:nvSpPr>
+          <p:cNvPr id="13" name="Text 11"/>
+          <p:cNvSpPr/>
+          <p:nvPr/>
+        </p:nvSpPr>
+        <p:spPr>
+          <a:xfrm>
+            <a:off x="566928" y="2167128"/>
+            <a:ext cx="5394960" cy="475488"/>
+          </a:xfrm>
+          <a:prstGeom prst="rect">
+            <a:avLst/>
+          </a:prstGeom>
+          <a:noFill/>
+          <a:ln/>
+        </p:spPr>
+        <p:txBody>
+          <a:bodyPr wrap="square" lIns="0" tIns="0" rIns="0" bIns="0" rtlCol="0" anchor="ctr"/>
+          <a:lstStyle/>
+          <a:p>
+            <a:pPr marL="0" indent="0">
+              <a:buNone/>
+            </a:pPr>
+            <a:r>
+              <a:rPr lang="en-US" sz="1200" dirty="0">
+                <a:solidFill>
+                  <a:srgbClr val="F1F5F9"/>
+                </a:solidFill>
+                <a:latin typeface="Calibri" pitchFamily="34" charset="0"/>
+                <a:ea typeface="Calibri" pitchFamily="34" charset="-122"/>
+                <a:cs typeface="Calibri" pitchFamily="34" charset="-120"/>
+              </a:rPr>
+              <a:t>Metodología Kanban aplicada en todo el desarrollo con Trello</a:t>
+            </a:r>
+            <a:endParaRPr lang="en-US" sz="1200" dirty="0"/>
+          </a:p>
+        </p:txBody>
+      </p:sp>
+      <p:sp>
+        <p:nvSpPr>
+          <p:cNvPr id="14" name="Text 12"/>
+          <p:cNvSpPr/>
+          <p:nvPr/>
+        </p:nvSpPr>
+        <p:spPr>
+          <a:xfrm>
+            <a:off x="329184" y="2752344"/>
+            <a:ext cx="5486400" cy="384048"/>
+          </a:xfrm>
+          <a:prstGeom prst="rect">
+            <a:avLst/>
+          </a:prstGeom>
+          <a:noFill/>
+          <a:ln/>
+        </p:spPr>
+        <p:txBody>
+          <a:bodyPr wrap="square" lIns="0" tIns="0" rIns="0" bIns="0" rtlCol="0" anchor="ctr"/>
+          <a:lstStyle/>
+          <a:p>
+            <a:pPr marL="0" indent="0">
+              <a:buNone/>
+            </a:pPr>
+            <a:r>
+              <a:rPr lang="en-US" sz="1500" b="1" dirty="0">
+                <a:solidFill>
+                  <a:srgbClr val="F97316"/>
+                </a:solidFill>
+                <a:latin typeface="Trebuchet MS" pitchFamily="34" charset="0"/>
+                <a:ea typeface="Trebuchet MS" pitchFamily="34" charset="-122"/>
+                <a:cs typeface="Trebuchet MS" pitchFamily="34" charset="-120"/>
+              </a:rPr>
+              <a:t>⚡  Pendiente y mejoras futuras</a:t>
+            </a:r>
+            <a:endParaRPr lang="en-US" sz="1500" dirty="0"/>
+          </a:p>
+        </p:txBody>
+      </p:sp>
+      <p:sp>
+        <p:nvSpPr>
+          <p:cNvPr id="15" name="Shape 13"/>
+          <p:cNvSpPr/>
+          <p:nvPr/>
+        </p:nvSpPr>
+        <p:spPr>
+          <a:xfrm>
+            <a:off x="365760" y="3273552"/>
+            <a:ext cx="201168" cy="201168"/>
+          </a:xfrm>
+          <a:prstGeom prst="ellipse">
+            <a:avLst/>
+          </a:prstGeom>
+          <a:solidFill>
+            <a:srgbClr val="F97316"/>
+          </a:solidFill>
+          <a:ln w="12700">
+            <a:solidFill>
+              <a:srgbClr val="F97316"/>
+            </a:solidFill>
+            <a:prstDash val="solid"/>
+          </a:ln>
+        </p:spPr>
+        <p:txBody>
+          <a:bodyPr/>
+          <a:lstStyle/>
+          <a:p>
+            <a:endParaRPr lang="es-ES"/>
+          </a:p>
+        </p:txBody>
+      </p:sp>
+      <p:sp>
+        <p:nvSpPr>
+          <p:cNvPr id="16" name="Text 14"/>
+          <p:cNvSpPr/>
+          <p:nvPr/>
+        </p:nvSpPr>
+        <p:spPr>
+          <a:xfrm>
+            <a:off x="676656" y="3182112"/>
+            <a:ext cx="5120640" cy="347472"/>
+          </a:xfrm>
+          <a:prstGeom prst="rect">
+            <a:avLst/>
+          </a:prstGeom>
+          <a:noFill/>
+          <a:ln/>
+        </p:spPr>
+        <p:txBody>
+          <a:bodyPr wrap="square" lIns="0" tIns="0" rIns="0" bIns="0" rtlCol="0" anchor="ctr"/>
+          <a:lstStyle/>
+          <a:p>
+            <a:pPr marL="0" indent="0">
+              <a:buNone/>
+            </a:pPr>
+            <a:r>
+              <a:rPr lang="en-US" sz="1200" dirty="0">
+                <a:solidFill>
+                  <a:srgbClr val="F1F5F9"/>
+                </a:solidFill>
+                <a:latin typeface="Calibri" pitchFamily="34" charset="0"/>
+                <a:ea typeface="Calibri" pitchFamily="34" charset="-122"/>
+                <a:cs typeface="Calibri" pitchFamily="34" charset="-120"/>
+              </a:rPr>
+              <a:t>Conexión real frontend backend </a:t>
+            </a:r>
+            <a:endParaRPr lang="en-US" sz="1200" dirty="0"/>
+          </a:p>
+        </p:txBody>
+      </p:sp>
+      <p:sp>
+        <p:nvSpPr>
+          <p:cNvPr id="17" name="Shape 15"/>
+          <p:cNvSpPr/>
+          <p:nvPr/>
+        </p:nvSpPr>
+        <p:spPr>
+          <a:xfrm>
+            <a:off x="365760" y="3634740"/>
+            <a:ext cx="201168" cy="201168"/>
+          </a:xfrm>
+          <a:prstGeom prst="ellipse">
+            <a:avLst/>
+          </a:prstGeom>
+          <a:solidFill>
+            <a:srgbClr val="F97316"/>
+          </a:solidFill>
+          <a:ln w="12700">
+            <a:solidFill>
+              <a:srgbClr val="F97316"/>
+            </a:solidFill>
+            <a:prstDash val="solid"/>
+          </a:ln>
+        </p:spPr>
+        <p:txBody>
+          <a:bodyPr/>
+          <a:lstStyle/>
+          <a:p>
+            <a:endParaRPr lang="es-ES"/>
+          </a:p>
+        </p:txBody>
+      </p:sp>
+      <p:sp>
+        <p:nvSpPr>
+          <p:cNvPr id="18" name="Text 16"/>
+          <p:cNvSpPr/>
+          <p:nvPr/>
+        </p:nvSpPr>
+        <p:spPr>
+          <a:xfrm>
+            <a:off x="676656" y="3549490"/>
+            <a:ext cx="5120640" cy="347472"/>
+          </a:xfrm>
+          <a:prstGeom prst="rect">
+            <a:avLst/>
+          </a:prstGeom>
+          <a:noFill/>
+          <a:ln/>
+        </p:spPr>
+        <p:txBody>
+          <a:bodyPr wrap="square" lIns="0" tIns="0" rIns="0" bIns="0" rtlCol="0" anchor="ctr"/>
+          <a:lstStyle/>
+          <a:p>
+            <a:pPr marL="0" indent="0">
+              <a:buNone/>
+            </a:pPr>
+            <a:r>
+              <a:rPr lang="en-US" sz="1200" dirty="0">
+                <a:solidFill>
+                  <a:srgbClr val="F1F5F9"/>
+                </a:solidFill>
+                <a:latin typeface="Calibri" pitchFamily="34" charset="0"/>
+                <a:ea typeface="Calibri" pitchFamily="34" charset="-122"/>
+                <a:cs typeface="Calibri" pitchFamily="34" charset="-120"/>
+              </a:rPr>
+              <a:t>Búsqueda por mapa interactivo (API Maps)</a:t>
+            </a:r>
+            <a:endParaRPr lang="en-US" sz="1200" dirty="0"/>
+          </a:p>
+        </p:txBody>
+      </p:sp>
+      <p:sp>
+        <p:nvSpPr>
+          <p:cNvPr id="19" name="Shape 17"/>
+          <p:cNvSpPr/>
+          <p:nvPr/>
+        </p:nvSpPr>
+        <p:spPr>
+          <a:xfrm>
+            <a:off x="365760" y="4008309"/>
+            <a:ext cx="201168" cy="201168"/>
+          </a:xfrm>
+          <a:prstGeom prst="ellipse">
+            <a:avLst/>
+          </a:prstGeom>
+          <a:solidFill>
+            <a:srgbClr val="F97316"/>
+          </a:solidFill>
+          <a:ln w="12700">
+            <a:solidFill>
+              <a:srgbClr val="F97316"/>
+            </a:solidFill>
+            <a:prstDash val="solid"/>
+          </a:ln>
+        </p:spPr>
+        <p:txBody>
+          <a:bodyPr/>
+          <a:lstStyle/>
+          <a:p>
+            <a:endParaRPr lang="es-ES"/>
+          </a:p>
+        </p:txBody>
+      </p:sp>
+      <p:sp>
+        <p:nvSpPr>
+          <p:cNvPr id="20" name="Text 18"/>
+          <p:cNvSpPr/>
+          <p:nvPr/>
+        </p:nvSpPr>
+        <p:spPr>
+          <a:xfrm>
+            <a:off x="676656" y="3916869"/>
+            <a:ext cx="5120640" cy="347472"/>
+          </a:xfrm>
+          <a:prstGeom prst="rect">
+            <a:avLst/>
+          </a:prstGeom>
+          <a:noFill/>
+          <a:ln/>
+        </p:spPr>
+        <p:txBody>
+          <a:bodyPr wrap="square" lIns="0" tIns="0" rIns="0" bIns="0" rtlCol="0" anchor="ctr"/>
+          <a:lstStyle/>
+          <a:p>
+            <a:pPr marL="0" indent="0">
+              <a:buNone/>
+            </a:pPr>
+            <a:r>
+              <a:rPr lang="en-US" sz="1200" dirty="0">
+                <a:solidFill>
+                  <a:srgbClr val="F1F5F9"/>
+                </a:solidFill>
+                <a:latin typeface="Calibri" pitchFamily="34" charset="0"/>
+                <a:ea typeface="Calibri" pitchFamily="34" charset="-122"/>
+                <a:cs typeface="Calibri" pitchFamily="34" charset="-120"/>
+              </a:rPr>
+              <a:t>App móvil con Flutter / Android Studio (CRM)</a:t>
+            </a:r>
+            <a:endParaRPr lang="en-US" sz="1200" dirty="0"/>
+          </a:p>
+        </p:txBody>
+      </p:sp>
+      <p:sp>
+        <p:nvSpPr>
+          <p:cNvPr id="21" name="Shape 15">
+            <a:extLst>
+              <a:ext uri="{FF2B5EF4-FFF2-40B4-BE49-F238E27FC236}">
+                <a16:creationId xmlns:a16="http://schemas.microsoft.com/office/drawing/2014/main" id="{259169BB-2C76-1DAA-F95C-96B604AAD5CC}"/>
+              </a:ext>
+            </a:extLst>
+          </p:cNvPr>
+          <p:cNvSpPr/>
+          <p:nvPr/>
+        </p:nvSpPr>
+        <p:spPr>
+          <a:xfrm>
+            <a:off x="365760" y="4364642"/>
+            <a:ext cx="201168" cy="201168"/>
+          </a:xfrm>
+          <a:prstGeom prst="ellipse">
+            <a:avLst/>
+          </a:prstGeom>
+          <a:solidFill>
+            <a:srgbClr val="F97316"/>
+          </a:solidFill>
+          <a:ln w="12700">
+            <a:solidFill>
+              <a:srgbClr val="F97316"/>
+            </a:solidFill>
+            <a:prstDash val="solid"/>
+          </a:ln>
+        </p:spPr>
+        <p:txBody>
+          <a:bodyPr/>
+          <a:lstStyle/>
+          <a:p>
+            <a:endParaRPr lang="es-ES"/>
+          </a:p>
+        </p:txBody>
+      </p:sp>
+      <p:sp>
+        <p:nvSpPr>
+          <p:cNvPr id="22" name="Text 16">
+            <a:extLst>
+              <a:ext uri="{FF2B5EF4-FFF2-40B4-BE49-F238E27FC236}">
+                <a16:creationId xmlns:a16="http://schemas.microsoft.com/office/drawing/2014/main" id="{243FCEE5-3E00-BE6F-9963-227D94A8010D}"/>
+              </a:ext>
+            </a:extLst>
+          </p:cNvPr>
+          <p:cNvSpPr/>
+          <p:nvPr/>
+        </p:nvSpPr>
+        <p:spPr>
+          <a:xfrm>
+            <a:off x="676656" y="4279392"/>
+            <a:ext cx="5120640" cy="347472"/>
+          </a:xfrm>
+          <a:prstGeom prst="rect">
+            <a:avLst/>
+          </a:prstGeom>
+          <a:noFill/>
+          <a:ln/>
+        </p:spPr>
+        <p:txBody>
+          <a:bodyPr wrap="square" lIns="0" tIns="0" rIns="0" bIns="0" rtlCol="0" anchor="ctr"/>
+          <a:lstStyle/>
+          <a:p>
+            <a:pPr marL="0" indent="0">
+              <a:buNone/>
+            </a:pPr>
+            <a:r>
+              <a:rPr lang="en-US" sz="1200" dirty="0" err="1">
+                <a:solidFill>
+                  <a:schemeClr val="bg1"/>
+                </a:solidFill>
+              </a:rPr>
+              <a:t>Función</a:t>
+            </a:r>
+            <a:r>
+              <a:rPr lang="en-US" sz="1200" dirty="0">
+                <a:solidFill>
+                  <a:schemeClr val="bg1"/>
+                </a:solidFill>
+              </a:rPr>
+              <a:t> para </a:t>
+            </a:r>
+            <a:r>
+              <a:rPr lang="en-US" sz="1200" dirty="0" err="1">
+                <a:solidFill>
+                  <a:schemeClr val="bg1"/>
+                </a:solidFill>
+              </a:rPr>
+              <a:t>firmar</a:t>
+            </a:r>
+            <a:r>
+              <a:rPr lang="en-US" sz="1200" dirty="0">
+                <a:solidFill>
+                  <a:schemeClr val="bg1"/>
+                </a:solidFill>
+              </a:rPr>
+              <a:t> </a:t>
+            </a:r>
+            <a:r>
+              <a:rPr lang="en-US" sz="1200" dirty="0" err="1">
+                <a:solidFill>
+                  <a:schemeClr val="bg1"/>
+                </a:solidFill>
+              </a:rPr>
+              <a:t>contratos</a:t>
+            </a:r>
+            <a:r>
+              <a:rPr lang="en-US" sz="1200" dirty="0">
+                <a:solidFill>
+                  <a:schemeClr val="bg1"/>
+                </a:solidFill>
+              </a:rPr>
+              <a:t> </a:t>
+            </a:r>
+            <a:r>
+              <a:rPr lang="en-US" sz="1200" dirty="0" err="1">
+                <a:solidFill>
+                  <a:schemeClr val="bg1"/>
+                </a:solidFill>
+              </a:rPr>
+              <a:t>desde</a:t>
+            </a:r>
+            <a:r>
+              <a:rPr lang="en-US" sz="1200" dirty="0">
+                <a:solidFill>
+                  <a:schemeClr val="bg1"/>
+                </a:solidFill>
+              </a:rPr>
+              <a:t> la App</a:t>
+            </a:r>
+          </a:p>
+        </p:txBody>
+      </p:sp>
+      <p:sp>
+        <p:nvSpPr>
+          <p:cNvPr id="23" name="Shape 15">
+            <a:extLst>
+              <a:ext uri="{FF2B5EF4-FFF2-40B4-BE49-F238E27FC236}">
+                <a16:creationId xmlns:a16="http://schemas.microsoft.com/office/drawing/2014/main" id="{E05FB447-39AC-7B84-C760-D3E424F8E159}"/>
+              </a:ext>
+            </a:extLst>
+          </p:cNvPr>
+          <p:cNvSpPr/>
+          <p:nvPr/>
+        </p:nvSpPr>
+        <p:spPr>
+          <a:xfrm>
+            <a:off x="365760" y="4727165"/>
+            <a:ext cx="201168" cy="201168"/>
+          </a:xfrm>
+          <a:prstGeom prst="ellipse">
+            <a:avLst/>
+          </a:prstGeom>
+          <a:solidFill>
+            <a:srgbClr val="F97316"/>
+          </a:solidFill>
+          <a:ln w="12700">
+            <a:solidFill>
+              <a:srgbClr val="F97316"/>
+            </a:solidFill>
+            <a:prstDash val="solid"/>
+          </a:ln>
+        </p:spPr>
+        <p:txBody>
+          <a:bodyPr/>
+          <a:lstStyle/>
+          <a:p>
+            <a:endParaRPr lang="es-ES"/>
+          </a:p>
+        </p:txBody>
+      </p:sp>
+      <p:sp>
+        <p:nvSpPr>
+          <p:cNvPr id="24" name="Text 16">
+            <a:extLst>
+              <a:ext uri="{FF2B5EF4-FFF2-40B4-BE49-F238E27FC236}">
+                <a16:creationId xmlns:a16="http://schemas.microsoft.com/office/drawing/2014/main" id="{3B7F75DE-983E-D9D7-C706-DEB85370919C}"/>
+              </a:ext>
+            </a:extLst>
+          </p:cNvPr>
+          <p:cNvSpPr/>
+          <p:nvPr/>
+        </p:nvSpPr>
+        <p:spPr>
+          <a:xfrm>
+            <a:off x="676656" y="4641915"/>
+            <a:ext cx="5120640" cy="347472"/>
+          </a:xfrm>
+          <a:prstGeom prst="rect">
+            <a:avLst/>
+          </a:prstGeom>
+          <a:noFill/>
+          <a:ln/>
+        </p:spPr>
+        <p:txBody>
+          <a:bodyPr wrap="square" lIns="0" tIns="0" rIns="0" bIns="0" rtlCol="0" anchor="ctr"/>
+          <a:lstStyle/>
+          <a:p>
+            <a:pPr marL="0" indent="0">
+              <a:buNone/>
+            </a:pPr>
+            <a:r>
+              <a:rPr lang="en-US" sz="1200" dirty="0" err="1">
+                <a:solidFill>
+                  <a:schemeClr val="bg1"/>
+                </a:solidFill>
+              </a:rPr>
+              <a:t>Función</a:t>
+            </a:r>
+            <a:r>
+              <a:rPr lang="en-US" sz="1200" dirty="0">
+                <a:solidFill>
+                  <a:schemeClr val="bg1"/>
+                </a:solidFill>
+              </a:rPr>
+              <a:t> para </a:t>
+            </a:r>
+            <a:r>
+              <a:rPr lang="en-US" sz="1200" dirty="0" err="1">
+                <a:solidFill>
+                  <a:schemeClr val="bg1"/>
+                </a:solidFill>
+              </a:rPr>
+              <a:t>controlar</a:t>
+            </a:r>
+            <a:r>
+              <a:rPr lang="en-US" sz="1200" dirty="0">
+                <a:solidFill>
+                  <a:schemeClr val="bg1"/>
+                </a:solidFill>
+              </a:rPr>
+              <a:t> </a:t>
+            </a:r>
+            <a:r>
+              <a:rPr lang="en-US" sz="1200" dirty="0" err="1">
+                <a:solidFill>
+                  <a:schemeClr val="bg1"/>
+                </a:solidFill>
+              </a:rPr>
+              <a:t>el</a:t>
+            </a:r>
+            <a:r>
+              <a:rPr lang="en-US" sz="1200" dirty="0">
+                <a:solidFill>
+                  <a:schemeClr val="bg1"/>
+                </a:solidFill>
+              </a:rPr>
+              <a:t> </a:t>
+            </a:r>
+            <a:r>
+              <a:rPr lang="en-US" sz="1200" dirty="0" err="1">
+                <a:solidFill>
+                  <a:schemeClr val="bg1"/>
+                </a:solidFill>
+              </a:rPr>
+              <a:t>depósito</a:t>
+            </a:r>
+            <a:r>
+              <a:rPr lang="en-US" sz="1200" dirty="0">
+                <a:solidFill>
+                  <a:schemeClr val="bg1"/>
+                </a:solidFill>
+              </a:rPr>
+              <a:t> del </a:t>
+            </a:r>
+            <a:r>
+              <a:rPr lang="en-US" sz="1200" dirty="0" err="1">
+                <a:solidFill>
+                  <a:schemeClr val="bg1"/>
+                </a:solidFill>
+              </a:rPr>
+              <a:t>alquiler</a:t>
+            </a:r>
+            <a:r>
+              <a:rPr lang="en-US" sz="1200" dirty="0">
+                <a:solidFill>
+                  <a:schemeClr val="bg1"/>
+                </a:solidFill>
+              </a:rPr>
+              <a:t> y </a:t>
+            </a:r>
+            <a:r>
+              <a:rPr lang="en-US" sz="1200" dirty="0" err="1">
+                <a:solidFill>
+                  <a:schemeClr val="bg1"/>
+                </a:solidFill>
+              </a:rPr>
+              <a:t>evitar</a:t>
+            </a:r>
+            <a:r>
+              <a:rPr lang="en-US" sz="1200" dirty="0">
+                <a:solidFill>
+                  <a:schemeClr val="bg1"/>
+                </a:solidFill>
+              </a:rPr>
+              <a:t> </a:t>
+            </a:r>
+            <a:r>
+              <a:rPr lang="en-US" sz="1200" dirty="0" err="1">
+                <a:solidFill>
+                  <a:schemeClr val="bg1"/>
+                </a:solidFill>
+              </a:rPr>
+              <a:t>fraudes</a:t>
+            </a:r>
+            <a:endParaRPr lang="en-US" sz="1200" dirty="0">
+              <a:solidFill>
+                <a:schemeClr val="bg1"/>
+              </a:solidFill>
+            </a:endParaRPr>
+          </a:p>
+        </p:txBody>
+      </p:sp>
+    </p:spTree>
+  </p:cSld>
+  <p:clrMapOvr>
+    <a:masterClrMapping/>
+  </p:clrMapOvr>
+</p:sld>
+</file>
+
+<file path=ppt/slides/slide11.xml><?xml version="1.0" encoding="utf-8"?>
+<p:sld xmlns:a="http://schemas.openxmlformats.org/drawingml/2006/main" xmlns:r="http://schemas.openxmlformats.org/officeDocument/2006/relationships" xmlns:p="http://schemas.openxmlformats.org/presentationml/2006/main">
   <p:cSld>
     <p:bg>
       <p:bgPr>
@@ -2167,1032 +3193,6 @@
         <p14:creationId xmlns:p14="http://schemas.microsoft.com/office/powerpoint/2010/main" val="3937770492"/>
       </p:ext>
     </p:extLst>
-  </p:cSld>
-  <p:clrMapOvr>
-    <a:masterClrMapping/>
-  </p:clrMapOvr>
-</p:sld>
-</file>
-
-<file path=ppt/slides/slide11.xml><?xml version="1.0" encoding="utf-8"?>
-<p:sld xmlns:a="http://schemas.openxmlformats.org/drawingml/2006/main" xmlns:r="http://schemas.openxmlformats.org/officeDocument/2006/relationships" xmlns:p="http://schemas.openxmlformats.org/presentationml/2006/main">
-  <p:cSld name="Slide 8">
-    <p:bg>
-      <p:bgPr>
-        <a:solidFill>
-          <a:srgbClr val="1A2340"/>
-        </a:solidFill>
-        <a:effectLst/>
-      </p:bgPr>
-    </p:bg>
-    <p:spTree>
-      <p:nvGrpSpPr>
-        <p:cNvPr id="1" name=""/>
-        <p:cNvGrpSpPr/>
-        <p:nvPr/>
-      </p:nvGrpSpPr>
-      <p:grpSpPr>
-        <a:xfrm>
-          <a:off x="0" y="0"/>
-          <a:ext cx="0" cy="0"/>
-          <a:chOff x="0" y="0"/>
-          <a:chExt cx="0" cy="0"/>
-        </a:xfrm>
-      </p:grpSpPr>
-      <p:sp>
-        <p:nvSpPr>
-          <p:cNvPr id="2" name="Shape 0"/>
-          <p:cNvSpPr/>
-          <p:nvPr/>
-        </p:nvSpPr>
-        <p:spPr>
-          <a:xfrm>
-            <a:off x="5943600" y="-457200"/>
-            <a:ext cx="4572000" cy="4572000"/>
-          </a:xfrm>
-          <a:prstGeom prst="ellipse">
-            <a:avLst/>
-          </a:prstGeom>
-          <a:solidFill>
-            <a:srgbClr val="243562"/>
-          </a:solidFill>
-          <a:ln w="12700">
-            <a:solidFill>
-              <a:srgbClr val="243562"/>
-            </a:solidFill>
-            <a:prstDash val="solid"/>
-          </a:ln>
-        </p:spPr>
-        <p:txBody>
-          <a:bodyPr/>
-          <a:lstStyle/>
-          <a:p>
-            <a:endParaRPr lang="es-ES"/>
-          </a:p>
-        </p:txBody>
-      </p:sp>
-      <p:sp>
-        <p:nvSpPr>
-          <p:cNvPr id="3" name="Shape 1"/>
-          <p:cNvSpPr/>
-          <p:nvPr/>
-        </p:nvSpPr>
-        <p:spPr>
-          <a:xfrm>
-            <a:off x="0" y="0"/>
-            <a:ext cx="5486400" cy="502920"/>
-          </a:xfrm>
-          <a:prstGeom prst="rect">
-            <a:avLst/>
-          </a:prstGeom>
-          <a:solidFill>
-            <a:srgbClr val="0D9488"/>
-          </a:solidFill>
-          <a:ln w="12700">
-            <a:solidFill>
-              <a:srgbClr val="0D9488"/>
-            </a:solidFill>
-            <a:prstDash val="solid"/>
-          </a:ln>
-        </p:spPr>
-        <p:txBody>
-          <a:bodyPr/>
-          <a:lstStyle/>
-          <a:p>
-            <a:endParaRPr lang="es-ES"/>
-          </a:p>
-        </p:txBody>
-      </p:sp>
-      <p:sp>
-        <p:nvSpPr>
-          <p:cNvPr id="4" name="Text 2"/>
-          <p:cNvSpPr/>
-          <p:nvPr/>
-        </p:nvSpPr>
-        <p:spPr>
-          <a:xfrm>
-            <a:off x="365760" y="73152"/>
-            <a:ext cx="4754880" cy="347472"/>
-          </a:xfrm>
-          <a:prstGeom prst="rect">
-            <a:avLst/>
-          </a:prstGeom>
-          <a:noFill/>
-          <a:ln/>
-        </p:spPr>
-        <p:txBody>
-          <a:bodyPr wrap="square" lIns="0" tIns="0" rIns="0" bIns="0" rtlCol="0" anchor="ctr"/>
-          <a:lstStyle/>
-          <a:p>
-            <a:pPr marL="0" indent="0">
-              <a:buNone/>
-            </a:pPr>
-            <a:r>
-              <a:rPr lang="en-US" sz="1400" b="1" dirty="0">
-                <a:solidFill>
-                  <a:srgbClr val="FFFFFF"/>
-                </a:solidFill>
-                <a:latin typeface="Trebuchet MS" pitchFamily="34" charset="0"/>
-                <a:ea typeface="Trebuchet MS" pitchFamily="34" charset="-122"/>
-                <a:cs typeface="Trebuchet MS" pitchFamily="34" charset="-120"/>
-              </a:rPr>
-              <a:t>CONCLUSIONES</a:t>
-            </a:r>
-            <a:endParaRPr lang="en-US" sz="1400" dirty="0"/>
-          </a:p>
-        </p:txBody>
-      </p:sp>
-      <p:sp>
-        <p:nvSpPr>
-          <p:cNvPr id="5" name="Text 3"/>
-          <p:cNvSpPr/>
-          <p:nvPr/>
-        </p:nvSpPr>
-        <p:spPr>
-          <a:xfrm>
-            <a:off x="365760" y="640080"/>
-            <a:ext cx="4572000" cy="384048"/>
-          </a:xfrm>
-          <a:prstGeom prst="rect">
-            <a:avLst/>
-          </a:prstGeom>
-          <a:noFill/>
-          <a:ln/>
-        </p:spPr>
-        <p:txBody>
-          <a:bodyPr wrap="square" lIns="0" tIns="0" rIns="0" bIns="0" rtlCol="0" anchor="ctr"/>
-          <a:lstStyle/>
-          <a:p>
-            <a:pPr marL="0" indent="0">
-              <a:buNone/>
-            </a:pPr>
-            <a:r>
-              <a:rPr lang="en-US" sz="1500" b="1" dirty="0">
-                <a:solidFill>
-                  <a:srgbClr val="14B8A6"/>
-                </a:solidFill>
-                <a:latin typeface="Trebuchet MS" pitchFamily="34" charset="0"/>
-                <a:ea typeface="Trebuchet MS" pitchFamily="34" charset="-122"/>
-                <a:cs typeface="Trebuchet MS" pitchFamily="34" charset="-120"/>
-              </a:rPr>
-              <a:t>✅  Logros</a:t>
-            </a:r>
-            <a:endParaRPr lang="en-US" sz="1500" dirty="0"/>
-          </a:p>
-        </p:txBody>
-      </p:sp>
-      <p:sp>
-        <p:nvSpPr>
-          <p:cNvPr id="6" name="Shape 4"/>
-          <p:cNvSpPr/>
-          <p:nvPr/>
-        </p:nvSpPr>
-        <p:spPr>
-          <a:xfrm>
-            <a:off x="365760" y="1088136"/>
-            <a:ext cx="54864" cy="274320"/>
-          </a:xfrm>
-          <a:prstGeom prst="rect">
-            <a:avLst/>
-          </a:prstGeom>
-          <a:solidFill>
-            <a:srgbClr val="0D9488"/>
-          </a:solidFill>
-          <a:ln w="12700">
-            <a:solidFill>
-              <a:srgbClr val="0D9488"/>
-            </a:solidFill>
-            <a:prstDash val="solid"/>
-          </a:ln>
-        </p:spPr>
-        <p:txBody>
-          <a:bodyPr/>
-          <a:lstStyle/>
-          <a:p>
-            <a:endParaRPr lang="es-ES"/>
-          </a:p>
-        </p:txBody>
-      </p:sp>
-      <p:sp>
-        <p:nvSpPr>
-          <p:cNvPr id="7" name="Text 5"/>
-          <p:cNvSpPr/>
-          <p:nvPr/>
-        </p:nvSpPr>
-        <p:spPr>
-          <a:xfrm>
-            <a:off x="566928" y="978408"/>
-            <a:ext cx="5394960" cy="475488"/>
-          </a:xfrm>
-          <a:prstGeom prst="rect">
-            <a:avLst/>
-          </a:prstGeom>
-          <a:noFill/>
-          <a:ln/>
-        </p:spPr>
-        <p:txBody>
-          <a:bodyPr wrap="square" lIns="0" tIns="0" rIns="0" bIns="0" rtlCol="0" anchor="ctr"/>
-          <a:lstStyle/>
-          <a:p>
-            <a:pPr marL="0" indent="0">
-              <a:buNone/>
-            </a:pPr>
-            <a:r>
-              <a:rPr lang="en-US" sz="1200" dirty="0">
-                <a:solidFill>
-                  <a:srgbClr val="F1F5F9"/>
-                </a:solidFill>
-                <a:latin typeface="Calibri" pitchFamily="34" charset="0"/>
-                <a:ea typeface="Calibri" pitchFamily="34" charset="-122"/>
-                <a:cs typeface="Calibri" pitchFamily="34" charset="-120"/>
-              </a:rPr>
-              <a:t>Web funcional con reconocimiento facial, filtros y solicitud de visitas</a:t>
-            </a:r>
-            <a:endParaRPr lang="en-US" sz="1200" dirty="0"/>
-          </a:p>
-        </p:txBody>
-      </p:sp>
-      <p:sp>
-        <p:nvSpPr>
-          <p:cNvPr id="8" name="Shape 6"/>
-          <p:cNvSpPr/>
-          <p:nvPr/>
-        </p:nvSpPr>
-        <p:spPr>
-          <a:xfrm>
-            <a:off x="365760" y="1476756"/>
-            <a:ext cx="54864" cy="274320"/>
-          </a:xfrm>
-          <a:prstGeom prst="rect">
-            <a:avLst/>
-          </a:prstGeom>
-          <a:solidFill>
-            <a:srgbClr val="0D9488"/>
-          </a:solidFill>
-          <a:ln w="12700">
-            <a:solidFill>
-              <a:srgbClr val="0D9488"/>
-            </a:solidFill>
-            <a:prstDash val="solid"/>
-          </a:ln>
-        </p:spPr>
-        <p:txBody>
-          <a:bodyPr/>
-          <a:lstStyle/>
-          <a:p>
-            <a:endParaRPr lang="es-ES"/>
-          </a:p>
-        </p:txBody>
-      </p:sp>
-      <p:sp>
-        <p:nvSpPr>
-          <p:cNvPr id="9" name="Text 7"/>
-          <p:cNvSpPr/>
-          <p:nvPr/>
-        </p:nvSpPr>
-        <p:spPr>
-          <a:xfrm>
-            <a:off x="566928" y="1367028"/>
-            <a:ext cx="5394960" cy="475488"/>
-          </a:xfrm>
-          <a:prstGeom prst="rect">
-            <a:avLst/>
-          </a:prstGeom>
-          <a:noFill/>
-          <a:ln/>
-        </p:spPr>
-        <p:txBody>
-          <a:bodyPr wrap="square" lIns="0" tIns="0" rIns="0" bIns="0" rtlCol="0" anchor="ctr"/>
-          <a:lstStyle/>
-          <a:p>
-            <a:pPr marL="0" indent="0">
-              <a:buNone/>
-            </a:pPr>
-            <a:r>
-              <a:rPr lang="en-US" sz="1200" dirty="0">
-                <a:solidFill>
-                  <a:srgbClr val="F1F5F9"/>
-                </a:solidFill>
-                <a:latin typeface="Calibri" pitchFamily="34" charset="0"/>
-                <a:ea typeface="Calibri" pitchFamily="34" charset="-122"/>
-                <a:cs typeface="Calibri" pitchFamily="34" charset="-120"/>
-              </a:rPr>
-              <a:t>Base de datos completa con triggers y app JavaFX de administración</a:t>
-            </a:r>
-            <a:endParaRPr lang="en-US" sz="1200" dirty="0"/>
-          </a:p>
-        </p:txBody>
-      </p:sp>
-      <p:sp>
-        <p:nvSpPr>
-          <p:cNvPr id="10" name="Shape 8"/>
-          <p:cNvSpPr/>
-          <p:nvPr/>
-        </p:nvSpPr>
-        <p:spPr>
-          <a:xfrm>
-            <a:off x="365760" y="1888236"/>
-            <a:ext cx="54864" cy="274320"/>
-          </a:xfrm>
-          <a:prstGeom prst="rect">
-            <a:avLst/>
-          </a:prstGeom>
-          <a:solidFill>
-            <a:srgbClr val="0D9488"/>
-          </a:solidFill>
-          <a:ln w="12700">
-            <a:solidFill>
-              <a:srgbClr val="0D9488"/>
-            </a:solidFill>
-            <a:prstDash val="solid"/>
-          </a:ln>
-        </p:spPr>
-        <p:txBody>
-          <a:bodyPr/>
-          <a:lstStyle/>
-          <a:p>
-            <a:endParaRPr lang="es-ES"/>
-          </a:p>
-        </p:txBody>
-      </p:sp>
-      <p:sp>
-        <p:nvSpPr>
-          <p:cNvPr id="11" name="Text 9"/>
-          <p:cNvSpPr/>
-          <p:nvPr/>
-        </p:nvSpPr>
-        <p:spPr>
-          <a:xfrm>
-            <a:off x="566928" y="1778508"/>
-            <a:ext cx="5394960" cy="475488"/>
-          </a:xfrm>
-          <a:prstGeom prst="rect">
-            <a:avLst/>
-          </a:prstGeom>
-          <a:noFill/>
-          <a:ln/>
-        </p:spPr>
-        <p:txBody>
-          <a:bodyPr wrap="square" lIns="0" tIns="0" rIns="0" bIns="0" rtlCol="0" anchor="ctr"/>
-          <a:lstStyle/>
-          <a:p>
-            <a:pPr marL="0" indent="0">
-              <a:buNone/>
-            </a:pPr>
-            <a:r>
-              <a:rPr lang="en-US" sz="1200" dirty="0">
-                <a:solidFill>
-                  <a:srgbClr val="F1F5F9"/>
-                </a:solidFill>
-                <a:latin typeface="Calibri" pitchFamily="34" charset="0"/>
-                <a:ea typeface="Calibri" pitchFamily="34" charset="-122"/>
-                <a:cs typeface="Calibri" pitchFamily="34" charset="-120"/>
-              </a:rPr>
-              <a:t>Simulación de conexión frontend–backend con Local Storage</a:t>
-            </a:r>
-            <a:endParaRPr lang="en-US" sz="1200" dirty="0"/>
-          </a:p>
-        </p:txBody>
-      </p:sp>
-      <p:sp>
-        <p:nvSpPr>
-          <p:cNvPr id="12" name="Shape 10"/>
-          <p:cNvSpPr/>
-          <p:nvPr/>
-        </p:nvSpPr>
-        <p:spPr>
-          <a:xfrm>
-            <a:off x="365760" y="2276856"/>
-            <a:ext cx="54864" cy="274320"/>
-          </a:xfrm>
-          <a:prstGeom prst="rect">
-            <a:avLst/>
-          </a:prstGeom>
-          <a:solidFill>
-            <a:srgbClr val="0D9488"/>
-          </a:solidFill>
-          <a:ln w="12700">
-            <a:solidFill>
-              <a:srgbClr val="0D9488"/>
-            </a:solidFill>
-            <a:prstDash val="solid"/>
-          </a:ln>
-        </p:spPr>
-        <p:txBody>
-          <a:bodyPr/>
-          <a:lstStyle/>
-          <a:p>
-            <a:endParaRPr lang="es-ES"/>
-          </a:p>
-        </p:txBody>
-      </p:sp>
-      <p:sp>
-        <p:nvSpPr>
-          <p:cNvPr id="13" name="Text 11"/>
-          <p:cNvSpPr/>
-          <p:nvPr/>
-        </p:nvSpPr>
-        <p:spPr>
-          <a:xfrm>
-            <a:off x="566928" y="2167128"/>
-            <a:ext cx="5394960" cy="475488"/>
-          </a:xfrm>
-          <a:prstGeom prst="rect">
-            <a:avLst/>
-          </a:prstGeom>
-          <a:noFill/>
-          <a:ln/>
-        </p:spPr>
-        <p:txBody>
-          <a:bodyPr wrap="square" lIns="0" tIns="0" rIns="0" bIns="0" rtlCol="0" anchor="ctr"/>
-          <a:lstStyle/>
-          <a:p>
-            <a:pPr marL="0" indent="0">
-              <a:buNone/>
-            </a:pPr>
-            <a:r>
-              <a:rPr lang="en-US" sz="1200" dirty="0">
-                <a:solidFill>
-                  <a:srgbClr val="F1F5F9"/>
-                </a:solidFill>
-                <a:latin typeface="Calibri" pitchFamily="34" charset="0"/>
-                <a:ea typeface="Calibri" pitchFamily="34" charset="-122"/>
-                <a:cs typeface="Calibri" pitchFamily="34" charset="-120"/>
-              </a:rPr>
-              <a:t>Metodología Kanban aplicada en todo el desarrollo con Trello</a:t>
-            </a:r>
-            <a:endParaRPr lang="en-US" sz="1200" dirty="0"/>
-          </a:p>
-        </p:txBody>
-      </p:sp>
-      <p:sp>
-        <p:nvSpPr>
-          <p:cNvPr id="14" name="Text 12"/>
-          <p:cNvSpPr/>
-          <p:nvPr/>
-        </p:nvSpPr>
-        <p:spPr>
-          <a:xfrm>
-            <a:off x="329184" y="2752344"/>
-            <a:ext cx="5486400" cy="384048"/>
-          </a:xfrm>
-          <a:prstGeom prst="rect">
-            <a:avLst/>
-          </a:prstGeom>
-          <a:noFill/>
-          <a:ln/>
-        </p:spPr>
-        <p:txBody>
-          <a:bodyPr wrap="square" lIns="0" tIns="0" rIns="0" bIns="0" rtlCol="0" anchor="ctr"/>
-          <a:lstStyle/>
-          <a:p>
-            <a:pPr marL="0" indent="0">
-              <a:buNone/>
-            </a:pPr>
-            <a:r>
-              <a:rPr lang="en-US" sz="1500" b="1" dirty="0">
-                <a:solidFill>
-                  <a:srgbClr val="F97316"/>
-                </a:solidFill>
-                <a:latin typeface="Trebuchet MS" pitchFamily="34" charset="0"/>
-                <a:ea typeface="Trebuchet MS" pitchFamily="34" charset="-122"/>
-                <a:cs typeface="Trebuchet MS" pitchFamily="34" charset="-120"/>
-              </a:rPr>
-              <a:t>⚡  Pendiente y mejoras futuras</a:t>
-            </a:r>
-            <a:endParaRPr lang="en-US" sz="1500" dirty="0"/>
-          </a:p>
-        </p:txBody>
-      </p:sp>
-      <p:sp>
-        <p:nvSpPr>
-          <p:cNvPr id="15" name="Shape 13"/>
-          <p:cNvSpPr/>
-          <p:nvPr/>
-        </p:nvSpPr>
-        <p:spPr>
-          <a:xfrm>
-            <a:off x="365760" y="3273552"/>
-            <a:ext cx="201168" cy="201168"/>
-          </a:xfrm>
-          <a:prstGeom prst="ellipse">
-            <a:avLst/>
-          </a:prstGeom>
-          <a:solidFill>
-            <a:srgbClr val="F97316"/>
-          </a:solidFill>
-          <a:ln w="12700">
-            <a:solidFill>
-              <a:srgbClr val="F97316"/>
-            </a:solidFill>
-            <a:prstDash val="solid"/>
-          </a:ln>
-        </p:spPr>
-        <p:txBody>
-          <a:bodyPr/>
-          <a:lstStyle/>
-          <a:p>
-            <a:endParaRPr lang="es-ES"/>
-          </a:p>
-        </p:txBody>
-      </p:sp>
-      <p:sp>
-        <p:nvSpPr>
-          <p:cNvPr id="16" name="Text 14"/>
-          <p:cNvSpPr/>
-          <p:nvPr/>
-        </p:nvSpPr>
-        <p:spPr>
-          <a:xfrm>
-            <a:off x="676656" y="3182112"/>
-            <a:ext cx="5120640" cy="347472"/>
-          </a:xfrm>
-          <a:prstGeom prst="rect">
-            <a:avLst/>
-          </a:prstGeom>
-          <a:noFill/>
-          <a:ln/>
-        </p:spPr>
-        <p:txBody>
-          <a:bodyPr wrap="square" lIns="0" tIns="0" rIns="0" bIns="0" rtlCol="0" anchor="ctr"/>
-          <a:lstStyle/>
-          <a:p>
-            <a:pPr marL="0" indent="0">
-              <a:buNone/>
-            </a:pPr>
-            <a:r>
-              <a:rPr lang="en-US" sz="1200" dirty="0">
-                <a:solidFill>
-                  <a:srgbClr val="F1F5F9"/>
-                </a:solidFill>
-                <a:latin typeface="Calibri" pitchFamily="34" charset="0"/>
-                <a:ea typeface="Calibri" pitchFamily="34" charset="-122"/>
-                <a:cs typeface="Calibri" pitchFamily="34" charset="-120"/>
-              </a:rPr>
-              <a:t>Conexión real frontend backend </a:t>
-            </a:r>
-            <a:endParaRPr lang="en-US" sz="1200" dirty="0"/>
-          </a:p>
-        </p:txBody>
-      </p:sp>
-      <p:sp>
-        <p:nvSpPr>
-          <p:cNvPr id="17" name="Shape 15"/>
-          <p:cNvSpPr/>
-          <p:nvPr/>
-        </p:nvSpPr>
-        <p:spPr>
-          <a:xfrm>
-            <a:off x="365760" y="3634740"/>
-            <a:ext cx="201168" cy="201168"/>
-          </a:xfrm>
-          <a:prstGeom prst="ellipse">
-            <a:avLst/>
-          </a:prstGeom>
-          <a:solidFill>
-            <a:srgbClr val="F97316"/>
-          </a:solidFill>
-          <a:ln w="12700">
-            <a:solidFill>
-              <a:srgbClr val="F97316"/>
-            </a:solidFill>
-            <a:prstDash val="solid"/>
-          </a:ln>
-        </p:spPr>
-        <p:txBody>
-          <a:bodyPr/>
-          <a:lstStyle/>
-          <a:p>
-            <a:endParaRPr lang="es-ES"/>
-          </a:p>
-        </p:txBody>
-      </p:sp>
-      <p:sp>
-        <p:nvSpPr>
-          <p:cNvPr id="18" name="Text 16"/>
-          <p:cNvSpPr/>
-          <p:nvPr/>
-        </p:nvSpPr>
-        <p:spPr>
-          <a:xfrm>
-            <a:off x="676656" y="3549490"/>
-            <a:ext cx="5120640" cy="347472"/>
-          </a:xfrm>
-          <a:prstGeom prst="rect">
-            <a:avLst/>
-          </a:prstGeom>
-          <a:noFill/>
-          <a:ln/>
-        </p:spPr>
-        <p:txBody>
-          <a:bodyPr wrap="square" lIns="0" tIns="0" rIns="0" bIns="0" rtlCol="0" anchor="ctr"/>
-          <a:lstStyle/>
-          <a:p>
-            <a:pPr marL="0" indent="0">
-              <a:buNone/>
-            </a:pPr>
-            <a:r>
-              <a:rPr lang="en-US" sz="1200" dirty="0">
-                <a:solidFill>
-                  <a:srgbClr val="F1F5F9"/>
-                </a:solidFill>
-                <a:latin typeface="Calibri" pitchFamily="34" charset="0"/>
-                <a:ea typeface="Calibri" pitchFamily="34" charset="-122"/>
-                <a:cs typeface="Calibri" pitchFamily="34" charset="-120"/>
-              </a:rPr>
-              <a:t>Búsqueda por mapa interactivo (API Maps)</a:t>
-            </a:r>
-            <a:endParaRPr lang="en-US" sz="1200" dirty="0"/>
-          </a:p>
-        </p:txBody>
-      </p:sp>
-      <p:sp>
-        <p:nvSpPr>
-          <p:cNvPr id="19" name="Shape 17"/>
-          <p:cNvSpPr/>
-          <p:nvPr/>
-        </p:nvSpPr>
-        <p:spPr>
-          <a:xfrm>
-            <a:off x="365760" y="4008309"/>
-            <a:ext cx="201168" cy="201168"/>
-          </a:xfrm>
-          <a:prstGeom prst="ellipse">
-            <a:avLst/>
-          </a:prstGeom>
-          <a:solidFill>
-            <a:srgbClr val="F97316"/>
-          </a:solidFill>
-          <a:ln w="12700">
-            <a:solidFill>
-              <a:srgbClr val="F97316"/>
-            </a:solidFill>
-            <a:prstDash val="solid"/>
-          </a:ln>
-        </p:spPr>
-        <p:txBody>
-          <a:bodyPr/>
-          <a:lstStyle/>
-          <a:p>
-            <a:endParaRPr lang="es-ES"/>
-          </a:p>
-        </p:txBody>
-      </p:sp>
-      <p:sp>
-        <p:nvSpPr>
-          <p:cNvPr id="20" name="Text 18"/>
-          <p:cNvSpPr/>
-          <p:nvPr/>
-        </p:nvSpPr>
-        <p:spPr>
-          <a:xfrm>
-            <a:off x="676656" y="3916869"/>
-            <a:ext cx="5120640" cy="347472"/>
-          </a:xfrm>
-          <a:prstGeom prst="rect">
-            <a:avLst/>
-          </a:prstGeom>
-          <a:noFill/>
-          <a:ln/>
-        </p:spPr>
-        <p:txBody>
-          <a:bodyPr wrap="square" lIns="0" tIns="0" rIns="0" bIns="0" rtlCol="0" anchor="ctr"/>
-          <a:lstStyle/>
-          <a:p>
-            <a:pPr marL="0" indent="0">
-              <a:buNone/>
-            </a:pPr>
-            <a:r>
-              <a:rPr lang="en-US" sz="1200" dirty="0">
-                <a:solidFill>
-                  <a:srgbClr val="F1F5F9"/>
-                </a:solidFill>
-                <a:latin typeface="Calibri" pitchFamily="34" charset="0"/>
-                <a:ea typeface="Calibri" pitchFamily="34" charset="-122"/>
-                <a:cs typeface="Calibri" pitchFamily="34" charset="-120"/>
-              </a:rPr>
-              <a:t>App móvil con Flutter / Android Studio (CRM)</a:t>
-            </a:r>
-            <a:endParaRPr lang="en-US" sz="1200" dirty="0"/>
-          </a:p>
-        </p:txBody>
-      </p:sp>
-      <p:sp>
-        <p:nvSpPr>
-          <p:cNvPr id="21" name="Shape 15">
-            <a:extLst>
-              <a:ext uri="{FF2B5EF4-FFF2-40B4-BE49-F238E27FC236}">
-                <a16:creationId xmlns:a16="http://schemas.microsoft.com/office/drawing/2014/main" id="{259169BB-2C76-1DAA-F95C-96B604AAD5CC}"/>
-              </a:ext>
-            </a:extLst>
-          </p:cNvPr>
-          <p:cNvSpPr/>
-          <p:nvPr/>
-        </p:nvSpPr>
-        <p:spPr>
-          <a:xfrm>
-            <a:off x="365760" y="4364642"/>
-            <a:ext cx="201168" cy="201168"/>
-          </a:xfrm>
-          <a:prstGeom prst="ellipse">
-            <a:avLst/>
-          </a:prstGeom>
-          <a:solidFill>
-            <a:srgbClr val="F97316"/>
-          </a:solidFill>
-          <a:ln w="12700">
-            <a:solidFill>
-              <a:srgbClr val="F97316"/>
-            </a:solidFill>
-            <a:prstDash val="solid"/>
-          </a:ln>
-        </p:spPr>
-        <p:txBody>
-          <a:bodyPr/>
-          <a:lstStyle/>
-          <a:p>
-            <a:endParaRPr lang="es-ES"/>
-          </a:p>
-        </p:txBody>
-      </p:sp>
-      <p:sp>
-        <p:nvSpPr>
-          <p:cNvPr id="22" name="Text 16">
-            <a:extLst>
-              <a:ext uri="{FF2B5EF4-FFF2-40B4-BE49-F238E27FC236}">
-                <a16:creationId xmlns:a16="http://schemas.microsoft.com/office/drawing/2014/main" id="{243FCEE5-3E00-BE6F-9963-227D94A8010D}"/>
-              </a:ext>
-            </a:extLst>
-          </p:cNvPr>
-          <p:cNvSpPr/>
-          <p:nvPr/>
-        </p:nvSpPr>
-        <p:spPr>
-          <a:xfrm>
-            <a:off x="676656" y="4279392"/>
-            <a:ext cx="5120640" cy="347472"/>
-          </a:xfrm>
-          <a:prstGeom prst="rect">
-            <a:avLst/>
-          </a:prstGeom>
-          <a:noFill/>
-          <a:ln/>
-        </p:spPr>
-        <p:txBody>
-          <a:bodyPr wrap="square" lIns="0" tIns="0" rIns="0" bIns="0" rtlCol="0" anchor="ctr"/>
-          <a:lstStyle/>
-          <a:p>
-            <a:pPr marL="0" indent="0">
-              <a:buNone/>
-            </a:pPr>
-            <a:r>
-              <a:rPr lang="en-US" sz="1200" dirty="0" err="1">
-                <a:solidFill>
-                  <a:schemeClr val="bg1"/>
-                </a:solidFill>
-              </a:rPr>
-              <a:t>Función</a:t>
-            </a:r>
-            <a:r>
-              <a:rPr lang="en-US" sz="1200" dirty="0">
-                <a:solidFill>
-                  <a:schemeClr val="bg1"/>
-                </a:solidFill>
-              </a:rPr>
-              <a:t> para </a:t>
-            </a:r>
-            <a:r>
-              <a:rPr lang="en-US" sz="1200" dirty="0" err="1">
-                <a:solidFill>
-                  <a:schemeClr val="bg1"/>
-                </a:solidFill>
-              </a:rPr>
-              <a:t>firmar</a:t>
-            </a:r>
-            <a:r>
-              <a:rPr lang="en-US" sz="1200" dirty="0">
-                <a:solidFill>
-                  <a:schemeClr val="bg1"/>
-                </a:solidFill>
-              </a:rPr>
-              <a:t> </a:t>
-            </a:r>
-            <a:r>
-              <a:rPr lang="en-US" sz="1200" dirty="0" err="1">
-                <a:solidFill>
-                  <a:schemeClr val="bg1"/>
-                </a:solidFill>
-              </a:rPr>
-              <a:t>contratos</a:t>
-            </a:r>
-            <a:r>
-              <a:rPr lang="en-US" sz="1200" dirty="0">
-                <a:solidFill>
-                  <a:schemeClr val="bg1"/>
-                </a:solidFill>
-              </a:rPr>
-              <a:t> </a:t>
-            </a:r>
-            <a:r>
-              <a:rPr lang="en-US" sz="1200" dirty="0" err="1">
-                <a:solidFill>
-                  <a:schemeClr val="bg1"/>
-                </a:solidFill>
-              </a:rPr>
-              <a:t>desde</a:t>
-            </a:r>
-            <a:r>
-              <a:rPr lang="en-US" sz="1200" dirty="0">
-                <a:solidFill>
-                  <a:schemeClr val="bg1"/>
-                </a:solidFill>
-              </a:rPr>
-              <a:t> la App</a:t>
-            </a:r>
-          </a:p>
-        </p:txBody>
-      </p:sp>
-      <p:sp>
-        <p:nvSpPr>
-          <p:cNvPr id="23" name="Shape 15">
-            <a:extLst>
-              <a:ext uri="{FF2B5EF4-FFF2-40B4-BE49-F238E27FC236}">
-                <a16:creationId xmlns:a16="http://schemas.microsoft.com/office/drawing/2014/main" id="{E05FB447-39AC-7B84-C760-D3E424F8E159}"/>
-              </a:ext>
-            </a:extLst>
-          </p:cNvPr>
-          <p:cNvSpPr/>
-          <p:nvPr/>
-        </p:nvSpPr>
-        <p:spPr>
-          <a:xfrm>
-            <a:off x="365760" y="4727165"/>
-            <a:ext cx="201168" cy="201168"/>
-          </a:xfrm>
-          <a:prstGeom prst="ellipse">
-            <a:avLst/>
-          </a:prstGeom>
-          <a:solidFill>
-            <a:srgbClr val="F97316"/>
-          </a:solidFill>
-          <a:ln w="12700">
-            <a:solidFill>
-              <a:srgbClr val="F97316"/>
-            </a:solidFill>
-            <a:prstDash val="solid"/>
-          </a:ln>
-        </p:spPr>
-        <p:txBody>
-          <a:bodyPr/>
-          <a:lstStyle/>
-          <a:p>
-            <a:endParaRPr lang="es-ES"/>
-          </a:p>
-        </p:txBody>
-      </p:sp>
-      <p:sp>
-        <p:nvSpPr>
-          <p:cNvPr id="24" name="Text 16">
-            <a:extLst>
-              <a:ext uri="{FF2B5EF4-FFF2-40B4-BE49-F238E27FC236}">
-                <a16:creationId xmlns:a16="http://schemas.microsoft.com/office/drawing/2014/main" id="{3B7F75DE-983E-D9D7-C706-DEB85370919C}"/>
-              </a:ext>
-            </a:extLst>
-          </p:cNvPr>
-          <p:cNvSpPr/>
-          <p:nvPr/>
-        </p:nvSpPr>
-        <p:spPr>
-          <a:xfrm>
-            <a:off x="676656" y="4641915"/>
-            <a:ext cx="5120640" cy="347472"/>
-          </a:xfrm>
-          <a:prstGeom prst="rect">
-            <a:avLst/>
-          </a:prstGeom>
-          <a:noFill/>
-          <a:ln/>
-        </p:spPr>
-        <p:txBody>
-          <a:bodyPr wrap="square" lIns="0" tIns="0" rIns="0" bIns="0" rtlCol="0" anchor="ctr"/>
-          <a:lstStyle/>
-          <a:p>
-            <a:pPr marL="0" indent="0">
-              <a:buNone/>
-            </a:pPr>
-            <a:r>
-              <a:rPr lang="en-US" sz="1200" dirty="0" err="1">
-                <a:solidFill>
-                  <a:schemeClr val="bg1"/>
-                </a:solidFill>
-              </a:rPr>
-              <a:t>Función</a:t>
-            </a:r>
-            <a:r>
-              <a:rPr lang="en-US" sz="1200" dirty="0">
-                <a:solidFill>
-                  <a:schemeClr val="bg1"/>
-                </a:solidFill>
-              </a:rPr>
-              <a:t> para </a:t>
-            </a:r>
-            <a:r>
-              <a:rPr lang="en-US" sz="1200" dirty="0" err="1">
-                <a:solidFill>
-                  <a:schemeClr val="bg1"/>
-                </a:solidFill>
-              </a:rPr>
-              <a:t>controlar</a:t>
-            </a:r>
-            <a:r>
-              <a:rPr lang="en-US" sz="1200" dirty="0">
-                <a:solidFill>
-                  <a:schemeClr val="bg1"/>
-                </a:solidFill>
-              </a:rPr>
-              <a:t> </a:t>
-            </a:r>
-            <a:r>
-              <a:rPr lang="en-US" sz="1200" dirty="0" err="1">
-                <a:solidFill>
-                  <a:schemeClr val="bg1"/>
-                </a:solidFill>
-              </a:rPr>
-              <a:t>el</a:t>
-            </a:r>
-            <a:r>
-              <a:rPr lang="en-US" sz="1200" dirty="0">
-                <a:solidFill>
-                  <a:schemeClr val="bg1"/>
-                </a:solidFill>
-              </a:rPr>
-              <a:t> </a:t>
-            </a:r>
-            <a:r>
-              <a:rPr lang="en-US" sz="1200" dirty="0" err="1">
-                <a:solidFill>
-                  <a:schemeClr val="bg1"/>
-                </a:solidFill>
-              </a:rPr>
-              <a:t>depósito</a:t>
-            </a:r>
-            <a:r>
-              <a:rPr lang="en-US" sz="1200" dirty="0">
-                <a:solidFill>
-                  <a:schemeClr val="bg1"/>
-                </a:solidFill>
-              </a:rPr>
-              <a:t> del </a:t>
-            </a:r>
-            <a:r>
-              <a:rPr lang="en-US" sz="1200" dirty="0" err="1">
-                <a:solidFill>
-                  <a:schemeClr val="bg1"/>
-                </a:solidFill>
-              </a:rPr>
-              <a:t>alquiler</a:t>
-            </a:r>
-            <a:r>
-              <a:rPr lang="en-US" sz="1200" dirty="0">
-                <a:solidFill>
-                  <a:schemeClr val="bg1"/>
-                </a:solidFill>
-              </a:rPr>
-              <a:t> y </a:t>
-            </a:r>
-            <a:r>
-              <a:rPr lang="en-US" sz="1200" dirty="0" err="1">
-                <a:solidFill>
-                  <a:schemeClr val="bg1"/>
-                </a:solidFill>
-              </a:rPr>
-              <a:t>evitar</a:t>
-            </a:r>
-            <a:r>
-              <a:rPr lang="en-US" sz="1200" dirty="0">
-                <a:solidFill>
-                  <a:schemeClr val="bg1"/>
-                </a:solidFill>
-              </a:rPr>
-              <a:t> </a:t>
-            </a:r>
-            <a:r>
-              <a:rPr lang="en-US" sz="1200" dirty="0" err="1">
-                <a:solidFill>
-                  <a:schemeClr val="bg1"/>
-                </a:solidFill>
-              </a:rPr>
-              <a:t>fraudes</a:t>
-            </a:r>
-            <a:endParaRPr lang="en-US" sz="1200" dirty="0">
-              <a:solidFill>
-                <a:schemeClr val="bg1"/>
-              </a:solidFill>
-            </a:endParaRPr>
-          </a:p>
-        </p:txBody>
-      </p:sp>
-    </p:spTree>
   </p:cSld>
   <p:clrMapOvr>
     <a:masterClrMapping/>
@@ -3455,7 +3455,7 @@
               <a:buNone/>
             </a:pPr>
             <a:r>
-              <a:rPr lang="en-US" sz="1400" b="1" dirty="0">
+              <a:rPr lang="en-US" sz="1400" b="1" dirty="0" err="1">
                 <a:solidFill>
                   <a:srgbClr val="1A2340"/>
                 </a:solidFill>
@@ -3463,7 +3463,29 @@
                 <a:ea typeface="Trebuchet MS" pitchFamily="34" charset="-122"/>
                 <a:cs typeface="Trebuchet MS" pitchFamily="34" charset="-120"/>
               </a:rPr>
-              <a:t>Oferta diluida</a:t>
+              <a:t>Oferta</a:t>
+            </a:r>
+            <a:r>
+              <a:rPr lang="en-US" sz="1400" b="1" dirty="0">
+                <a:solidFill>
+                  <a:srgbClr val="1A2340"/>
+                </a:solidFill>
+                <a:latin typeface="Trebuchet MS" pitchFamily="34" charset="0"/>
+                <a:ea typeface="Trebuchet MS" pitchFamily="34" charset="-122"/>
+                <a:cs typeface="Trebuchet MS" pitchFamily="34" charset="-120"/>
+              </a:rPr>
+              <a:t> </a:t>
+            </a:r>
+            <a:r>
+              <a:rPr lang="en-US" sz="1400" b="1" dirty="0" err="1">
+                <a:solidFill>
+                  <a:srgbClr val="1A2340"/>
+                </a:solidFill>
+                <a:latin typeface="Trebuchet MS" pitchFamily="34" charset="0"/>
+                <a:ea typeface="Trebuchet MS" pitchFamily="34" charset="-122"/>
+                <a:cs typeface="Trebuchet MS" pitchFamily="34" charset="-120"/>
+              </a:rPr>
+              <a:t>escasa</a:t>
             </a:r>
             <a:endParaRPr lang="en-US" sz="1400" dirty="0"/>
           </a:p>
@@ -6178,7 +6200,7 @@
                 <a:ea typeface="Calibri" pitchFamily="34" charset="-122"/>
                 <a:cs typeface="Calibri" pitchFamily="34" charset="-120"/>
               </a:rPr>
-              <a:t>App functional para </a:t>
+              <a:t>App </a:t>
             </a:r>
             <a:r>
               <a:rPr lang="en-US" sz="1200" dirty="0" err="1">
@@ -6189,6 +6211,28 @@
                 <a:ea typeface="Calibri" pitchFamily="34" charset="-122"/>
                 <a:cs typeface="Calibri" pitchFamily="34" charset="-120"/>
               </a:rPr>
+              <a:t>funcional</a:t>
+            </a:r>
+            <a:r>
+              <a:rPr lang="en-US" sz="1200" dirty="0">
+                <a:solidFill>
+                  <a:srgbClr val="334155"/>
+                </a:solidFill>
+                <a:latin typeface="Calibri" pitchFamily="34" charset="0"/>
+                <a:ea typeface="Calibri" pitchFamily="34" charset="-122"/>
+                <a:cs typeface="Calibri" pitchFamily="34" charset="-120"/>
+              </a:rPr>
+              <a:t> para </a:t>
+            </a:r>
+            <a:r>
+              <a:rPr lang="en-US" sz="1200" dirty="0" err="1">
+                <a:solidFill>
+                  <a:srgbClr val="334155"/>
+                </a:solidFill>
+                <a:latin typeface="Calibri" pitchFamily="34" charset="0"/>
+                <a:ea typeface="Calibri" pitchFamily="34" charset="-122"/>
+                <a:cs typeface="Calibri" pitchFamily="34" charset="-120"/>
+              </a:rPr>
               <a:t>insertar</a:t>
             </a:r>
             <a:r>
@@ -6200,7 +6244,29 @@
                 <a:ea typeface="Calibri" pitchFamily="34" charset="-122"/>
                 <a:cs typeface="Calibri" pitchFamily="34" charset="-120"/>
               </a:rPr>
-              <a:t>, actualizer, </a:t>
+              <a:t>, </a:t>
+            </a:r>
+            <a:r>
+              <a:rPr lang="en-US" sz="1200" dirty="0" err="1">
+                <a:solidFill>
+                  <a:srgbClr val="334155"/>
+                </a:solidFill>
+                <a:latin typeface="Calibri" pitchFamily="34" charset="0"/>
+                <a:ea typeface="Calibri" pitchFamily="34" charset="-122"/>
+                <a:cs typeface="Calibri" pitchFamily="34" charset="-120"/>
+              </a:rPr>
+              <a:t>actualizar</a:t>
+            </a:r>
+            <a:r>
+              <a:rPr lang="en-US" sz="1200" dirty="0">
+                <a:solidFill>
+                  <a:srgbClr val="334155"/>
+                </a:solidFill>
+                <a:latin typeface="Calibri" pitchFamily="34" charset="0"/>
+                <a:ea typeface="Calibri" pitchFamily="34" charset="-122"/>
+                <a:cs typeface="Calibri" pitchFamily="34" charset="-120"/>
+              </a:rPr>
+              <a:t>, </a:t>
             </a:r>
             <a:r>
               <a:rPr lang="en-US" sz="1200" dirty="0" err="1">
